--- a/Final Presentation/AETHER_Presentation.pptx
+++ b/Final Presentation/AETHER_Presentation.pptx
@@ -2138,7 +2138,7 @@
         </p:nvSpPr>
         <p:spPr>
           <a:xfrm>
-            <a:off x="822960" y="2331720"/>
+            <a:off x="822960" y="2075267"/>
             <a:ext cx="9144000" cy="1188720"/>
           </a:xfrm>
           <a:prstGeom prst="rect">
@@ -2177,7 +2177,7 @@
         </p:nvSpPr>
         <p:spPr>
           <a:xfrm>
-            <a:off x="868680" y="3429000"/>
+            <a:off x="822959" y="3142626"/>
             <a:ext cx="8686800" cy="548640"/>
           </a:xfrm>
           <a:prstGeom prst="rect">
@@ -2216,7 +2216,7 @@
         </p:nvSpPr>
         <p:spPr>
           <a:xfrm>
-            <a:off x="868680" y="4160520"/>
+            <a:off x="868680" y="3728259"/>
             <a:ext cx="1005840" cy="0"/>
           </a:xfrm>
           <a:prstGeom prst="line">
@@ -2239,7 +2239,7 @@
         </p:nvSpPr>
         <p:spPr>
           <a:xfrm>
-            <a:off x="868680" y="4434840"/>
+            <a:off x="822959" y="3926932"/>
             <a:ext cx="8229600" cy="457200"/>
           </a:xfrm>
           <a:prstGeom prst="rect">
@@ -2267,6 +2267,79 @@
               <a:t>DETECT   →   VERIFY   →   EQUIP   →   EVACUATE</a:t>
             </a:r>
             <a:endParaRPr lang="en-US" sz="1500" dirty="0"/>
+          </a:p>
+        </p:txBody>
+      </p:sp>
+      <p:sp>
+        <p:nvSpPr>
+          <p:cNvPr id="43" name="TextBox 42">
+            <a:extLst>
+              <a:ext uri="{FF2B5EF4-FFF2-40B4-BE49-F238E27FC236}">
+                <a16:creationId xmlns:a16="http://schemas.microsoft.com/office/drawing/2014/main" id="{70DD2C04-CA1C-BF75-5381-F159E3006AB6}"/>
+              </a:ext>
+            </a:extLst>
+          </p:cNvPr>
+          <p:cNvSpPr txBox="1"/>
+          <p:nvPr/>
+        </p:nvSpPr>
+        <p:spPr>
+          <a:xfrm>
+            <a:off x="8685968" y="4758625"/>
+            <a:ext cx="2780608" cy="1200329"/>
+          </a:xfrm>
+          <a:prstGeom prst="rect">
+            <a:avLst/>
+          </a:prstGeom>
+          <a:noFill/>
+        </p:spPr>
+        <p:txBody>
+          <a:bodyPr wrap="square" rtlCol="0">
+            <a:spAutoFit/>
+          </a:bodyPr>
+          <a:lstStyle/>
+          <a:p>
+            <a:pPr algn="r"/>
+            <a:r>
+              <a:rPr lang="en-IN" b="1" dirty="0">
+                <a:solidFill>
+                  <a:srgbClr val="6A7385"/>
+                </a:solidFill>
+              </a:rPr>
+              <a:t>By Team Code Blooded</a:t>
+            </a:r>
+          </a:p>
+          <a:p>
+            <a:pPr algn="r"/>
+            <a:r>
+              <a:rPr lang="en-IN" dirty="0">
+                <a:solidFill>
+                  <a:srgbClr val="6A7385"/>
+                </a:solidFill>
+              </a:rPr>
+              <a:t>Rasagna Abothula</a:t>
+            </a:r>
+          </a:p>
+          <a:p>
+            <a:pPr algn="r"/>
+            <a:r>
+              <a:rPr lang="en-IN" dirty="0">
+                <a:solidFill>
+                  <a:srgbClr val="6A7385"/>
+                </a:solidFill>
+              </a:rPr>
+              <a:t>Harmanjeet Singh Kalsi</a:t>
+            </a:r>
+          </a:p>
+          <a:p>
+            <a:pPr algn="r"/>
+            <a:r>
+              <a:rPr lang="en-IN" dirty="0">
+                <a:solidFill>
+                  <a:srgbClr val="6A7385"/>
+                </a:solidFill>
+              </a:rPr>
+              <a:t>Sanjay S V</a:t>
+            </a:r>
           </a:p>
         </p:txBody>
       </p:sp>
@@ -8850,57 +8923,93 @@
             <a:pPr marL="0" indent="0">
               <a:buNone/>
             </a:pPr>
-            <a:r>
-              <a:rPr lang="en-US" sz="1300" i="1" dirty="0">
-                <a:solidFill>
-                  <a:srgbClr val="FF6A3D"/>
+            <a:endParaRPr lang="en-US" sz="1300" dirty="0"/>
+          </a:p>
+        </p:txBody>
+      </p:sp>
+      <p:sp>
+        <p:nvSpPr>
+          <p:cNvPr id="36" name="Text 34"/>
+          <p:cNvSpPr/>
+          <p:nvPr/>
+        </p:nvSpPr>
+        <p:spPr>
+          <a:xfrm>
+            <a:off x="11475720" y="6446520"/>
+            <a:ext cx="548640" cy="274320"/>
+          </a:xfrm>
+          <a:prstGeom prst="rect">
+            <a:avLst/>
+          </a:prstGeom>
+          <a:noFill/>
+          <a:ln/>
+        </p:spPr>
+        <p:txBody>
+          <a:bodyPr wrap="square" rtlCol="0" anchor="ctr"/>
+          <a:lstStyle/>
+          <a:p>
+            <a:pPr marL="0" indent="0" algn="r">
+              <a:buNone/>
+            </a:pPr>
+            <a:r>
+              <a:rPr lang="en-US" sz="1000" dirty="0">
+                <a:solidFill>
+                  <a:srgbClr val="9AA3C2"/>
                 </a:solidFill>
                 <a:latin typeface="Calibri" pitchFamily="34" charset="0"/>
                 <a:ea typeface="Calibri" pitchFamily="34" charset="-122"/>
                 <a:cs typeface="Calibri" pitchFamily="34" charset="-120"/>
               </a:rPr>
-              <a:t>Questions &amp; Discussion</a:t>
-            </a:r>
-            <a:endParaRPr lang="en-US" sz="1300" dirty="0"/>
-          </a:p>
-        </p:txBody>
-      </p:sp>
-      <p:sp>
-        <p:nvSpPr>
-          <p:cNvPr id="36" name="Text 34"/>
-          <p:cNvSpPr/>
-          <p:nvPr/>
-        </p:nvSpPr>
-        <p:spPr>
-          <a:xfrm>
-            <a:off x="11475720" y="6446520"/>
-            <a:ext cx="548640" cy="274320"/>
+              <a:t>09</a:t>
+            </a:r>
+            <a:endParaRPr lang="en-US" sz="1000" dirty="0"/>
+          </a:p>
+        </p:txBody>
+      </p:sp>
+      <p:sp>
+        <p:nvSpPr>
+          <p:cNvPr id="38" name="TextBox 37">
+            <a:extLst>
+              <a:ext uri="{FF2B5EF4-FFF2-40B4-BE49-F238E27FC236}">
+                <a16:creationId xmlns:a16="http://schemas.microsoft.com/office/drawing/2014/main" id="{F99E7779-60B1-B929-AC89-DD955DD96E6B}"/>
+              </a:ext>
+            </a:extLst>
+          </p:cNvPr>
+          <p:cNvSpPr txBox="1"/>
+          <p:nvPr/>
+        </p:nvSpPr>
+        <p:spPr>
+          <a:xfrm>
+            <a:off x="822960" y="4466951"/>
+            <a:ext cx="10652760" cy="646331"/>
           </a:xfrm>
           <a:prstGeom prst="rect">
             <a:avLst/>
           </a:prstGeom>
           <a:noFill/>
-          <a:ln/>
-        </p:spPr>
-        <p:txBody>
-          <a:bodyPr wrap="square" rtlCol="0" anchor="ctr"/>
-          <a:lstStyle/>
-          <a:p>
-            <a:pPr marL="0" indent="0" algn="r">
-              <a:buNone/>
-            </a:pPr>
-            <a:r>
-              <a:rPr lang="en-US" sz="1000" dirty="0">
-                <a:solidFill>
-                  <a:srgbClr val="9AA3C2"/>
-                </a:solidFill>
-                <a:latin typeface="Calibri" pitchFamily="34" charset="0"/>
-                <a:ea typeface="Calibri" pitchFamily="34" charset="-122"/>
-                <a:cs typeface="Calibri" pitchFamily="34" charset="-120"/>
-              </a:rPr>
-              <a:t>09</a:t>
-            </a:r>
-            <a:endParaRPr lang="en-US" sz="1000" dirty="0"/>
+        </p:spPr>
+        <p:txBody>
+          <a:bodyPr wrap="square">
+            <a:spAutoFit/>
+          </a:bodyPr>
+          <a:lstStyle/>
+          <a:p>
+            <a:r>
+              <a:rPr lang="en-IN" sz="1800" dirty="0" err="1">
+                <a:solidFill>
+                  <a:srgbClr val="6A7385"/>
+                </a:solidFill>
+              </a:rPr>
+              <a:t>Github</a:t>
+            </a:r>
+            <a:r>
+              <a:rPr lang="en-IN" sz="1800" dirty="0">
+                <a:solidFill>
+                  <a:srgbClr val="6A7385"/>
+                </a:solidFill>
+              </a:rPr>
+              <a:t> Repository  Link : https://github.com/Rasagna-05/AETHER-AI-Powered-Disaster-Response-and-Relief-Management-System </a:t>
+            </a:r>
           </a:p>
         </p:txBody>
       </p:sp>
